--- a/ゲーム科1年/00_前期/ゲームエンジンⅠ/01_画面説明.pptx
+++ b/ゲーム科1年/00_前期/ゲームエンジンⅠ/01_画面説明.pptx
@@ -265,7 +265,7 @@
           <a:p>
             <a:fld id="{E9CC885B-4903-4D54-9A93-00025F12DED9}" type="datetimeFigureOut">
               <a:rPr kumimoji="1" lang="ja-JP" altLang="en-US" smtClean="0"/>
-              <a:t>2024/9/18</a:t>
+              <a:t>2025/3/3</a:t>
             </a:fld>
             <a:endParaRPr kumimoji="1" lang="ja-JP" altLang="en-US"/>
           </a:p>
@@ -495,7 +495,7 @@
           <a:p>
             <a:fld id="{E9CC885B-4903-4D54-9A93-00025F12DED9}" type="datetimeFigureOut">
               <a:rPr kumimoji="1" lang="ja-JP" altLang="en-US" smtClean="0"/>
-              <a:t>2024/9/18</a:t>
+              <a:t>2025/3/3</a:t>
             </a:fld>
             <a:endParaRPr kumimoji="1" lang="ja-JP" altLang="en-US"/>
           </a:p>
@@ -735,7 +735,7 @@
           <a:p>
             <a:fld id="{E9CC885B-4903-4D54-9A93-00025F12DED9}" type="datetimeFigureOut">
               <a:rPr kumimoji="1" lang="ja-JP" altLang="en-US" smtClean="0"/>
-              <a:t>2024/9/18</a:t>
+              <a:t>2025/3/3</a:t>
             </a:fld>
             <a:endParaRPr kumimoji="1" lang="ja-JP" altLang="en-US"/>
           </a:p>
@@ -965,7 +965,7 @@
           <a:p>
             <a:fld id="{E9CC885B-4903-4D54-9A93-00025F12DED9}" type="datetimeFigureOut">
               <a:rPr kumimoji="1" lang="ja-JP" altLang="en-US" smtClean="0"/>
-              <a:t>2024/9/18</a:t>
+              <a:t>2025/3/3</a:t>
             </a:fld>
             <a:endParaRPr kumimoji="1" lang="ja-JP" altLang="en-US"/>
           </a:p>
@@ -1240,7 +1240,7 @@
           <a:p>
             <a:fld id="{E9CC885B-4903-4D54-9A93-00025F12DED9}" type="datetimeFigureOut">
               <a:rPr kumimoji="1" lang="ja-JP" altLang="en-US" smtClean="0"/>
-              <a:t>2024/9/18</a:t>
+              <a:t>2025/3/3</a:t>
             </a:fld>
             <a:endParaRPr kumimoji="1" lang="ja-JP" altLang="en-US"/>
           </a:p>
@@ -1569,7 +1569,7 @@
           <a:p>
             <a:fld id="{E9CC885B-4903-4D54-9A93-00025F12DED9}" type="datetimeFigureOut">
               <a:rPr kumimoji="1" lang="ja-JP" altLang="en-US" smtClean="0"/>
-              <a:t>2024/9/18</a:t>
+              <a:t>2025/3/3</a:t>
             </a:fld>
             <a:endParaRPr kumimoji="1" lang="ja-JP" altLang="en-US"/>
           </a:p>
@@ -2045,7 +2045,7 @@
           <a:p>
             <a:fld id="{E9CC885B-4903-4D54-9A93-00025F12DED9}" type="datetimeFigureOut">
               <a:rPr kumimoji="1" lang="ja-JP" altLang="en-US" smtClean="0"/>
-              <a:t>2024/9/18</a:t>
+              <a:t>2025/3/3</a:t>
             </a:fld>
             <a:endParaRPr kumimoji="1" lang="ja-JP" altLang="en-US"/>
           </a:p>
@@ -2186,7 +2186,7 @@
           <a:p>
             <a:fld id="{E9CC885B-4903-4D54-9A93-00025F12DED9}" type="datetimeFigureOut">
               <a:rPr kumimoji="1" lang="ja-JP" altLang="en-US" smtClean="0"/>
-              <a:t>2024/9/18</a:t>
+              <a:t>2025/3/3</a:t>
             </a:fld>
             <a:endParaRPr kumimoji="1" lang="ja-JP" altLang="en-US"/>
           </a:p>
@@ -2299,7 +2299,7 @@
           <a:p>
             <a:fld id="{E9CC885B-4903-4D54-9A93-00025F12DED9}" type="datetimeFigureOut">
               <a:rPr kumimoji="1" lang="ja-JP" altLang="en-US" smtClean="0"/>
-              <a:t>2024/9/18</a:t>
+              <a:t>2025/3/3</a:t>
             </a:fld>
             <a:endParaRPr kumimoji="1" lang="ja-JP" altLang="en-US"/>
           </a:p>
@@ -2642,7 +2642,7 @@
           <a:p>
             <a:fld id="{E9CC885B-4903-4D54-9A93-00025F12DED9}" type="datetimeFigureOut">
               <a:rPr kumimoji="1" lang="ja-JP" altLang="en-US" smtClean="0"/>
-              <a:t>2024/9/18</a:t>
+              <a:t>2025/3/3</a:t>
             </a:fld>
             <a:endParaRPr kumimoji="1" lang="ja-JP" altLang="en-US"/>
           </a:p>
@@ -2930,7 +2930,7 @@
           <a:p>
             <a:fld id="{E9CC885B-4903-4D54-9A93-00025F12DED9}" type="datetimeFigureOut">
               <a:rPr kumimoji="1" lang="ja-JP" altLang="en-US" smtClean="0"/>
-              <a:t>2024/9/18</a:t>
+              <a:t>2025/3/3</a:t>
             </a:fld>
             <a:endParaRPr kumimoji="1" lang="ja-JP" altLang="en-US"/>
           </a:p>
@@ -3203,7 +3203,7 @@
           <a:p>
             <a:fld id="{E9CC885B-4903-4D54-9A93-00025F12DED9}" type="datetimeFigureOut">
               <a:rPr kumimoji="1" lang="ja-JP" altLang="en-US" smtClean="0"/>
-              <a:t>2024/9/18</a:t>
+              <a:t>2025/3/3</a:t>
             </a:fld>
             <a:endParaRPr kumimoji="1" lang="ja-JP" altLang="en-US"/>
           </a:p>
@@ -5070,7 +5070,7 @@
           <a:p>
             <a:r>
               <a:rPr kumimoji="1" lang="ja-JP" altLang="en-US" sz="2400" dirty="0"/>
-              <a:t>マウスのホイールで前進交代、ホイールのドラッグドロップでスライド、</a:t>
+              <a:t>マウスのホイールで前進後退、ホイールのドラッグドロップでスライド、</a:t>
             </a:r>
             <a:endParaRPr kumimoji="1" lang="en-US" altLang="ja-JP" sz="2400" dirty="0"/>
           </a:p>
